--- a/deliverables/demo.pptx
+++ b/deliverables/demo.pptx
@@ -4463,7 +4463,7 @@
                 </a:solidFill>
                 <a:latin typeface="Arial"/>
               </a:rPr>
-              <a:t>Kiro-built Strands agent on AgentCore Runtime with Claude Sonnet 4.5 on Bedrock and the baseline Guardrail. Eight tools run as a Lambda behind AgentCore Gateway (JWT via Cognito): Textract extraction with validity flags, Knowledge Base retrieval, DynamoDB services and applications, SNS plus Amazon Translate notifications. AgentCore Memory keeps citizen preferences. Traces in CloudWatch GenAI Observability.</a:t>
+              <a:t>Kiro-built Strands agent on AgentCore Runtime with Claude Sonnet 4.5 on Bedrock and the baseline Guardrail. Eight tools: Textract extraction with validity flags, Knowledge Base retrieval, DynamoDB services and applications, SNS plus Amazon Translate notifications; packaged both in-process and as a Gateway-ready Lambda. AgentCore Memory keeps citizen preferences. Traces in CloudWatch GenAI Observability.</a:t>
             </a:r>
           </a:p>
         </p:txBody>
@@ -5037,7 +5037,7 @@
                 </a:solidFill>
                 <a:latin typeface="Arial"/>
               </a:rPr>
-              <a:t>•  Honest limits: departments and submissions are mocked in DynamoDB; documents are synthetic</a:t>
+              <a:t>•  Honest limits: departments are mocked in DynamoDB, documents are synthetic, Gateway creation is denied in the workshop account so tools run in-process</a:t>
             </a:r>
           </a:p>
         </p:txBody>
